--- a/data-eng/decks/w2d3s4.pptx
+++ b/data-eng/decks/w2d3s4.pptx
@@ -10610,7 +10610,25 @@
                 <a:ea typeface="Pretendard"/>
                 <a:cs typeface="Pretendard"/>
               </a:rPr>
-              <a:t>ServerSelectionTimeoutError</a:t>
+              <a:t>30초 멈춘 뒤</a:t>
+            </a:r>
+          </a:p>
+          <a:p>
+            <a:pPr algn="l">
+              <a:lnSpc>
+                <a:spcPct val="115000"/>
+              </a:lnSpc>
+            </a:pPr>
+            <a:r>
+              <a:rPr sz="1875" b="1">
+                <a:solidFill>
+                  <a:srgbClr val="0D2B5E"/>
+                </a:solidFill>
+                <a:latin typeface="Pretendard"/>
+                <a:ea typeface="Pretendard"/>
+                <a:cs typeface="Pretendard"/>
+              </a:rPr>
+              <a:t>ServerSelectionTimeout</a:t>
             </a:r>
           </a:p>
         </p:txBody>
@@ -10760,7 +10778,25 @@
                 <a:ea typeface="Pretendard"/>
                 <a:cs typeface="Pretendard"/>
               </a:rPr>
-              <a:t>docker ps 확인 후 재기동</a:t>
+              <a:t>docker start 뒤</a:t>
+            </a:r>
+          </a:p>
+          <a:p>
+            <a:pPr algn="ctr">
+              <a:lnSpc>
+                <a:spcPct val="115000"/>
+              </a:lnSpc>
+            </a:pPr>
+            <a:r>
+              <a:rPr sz="1875" b="0">
+                <a:solidFill>
+                  <a:srgbClr val="3D3D3D"/>
+                </a:solidFill>
+                <a:latin typeface="Pretendard"/>
+                <a:ea typeface="Pretendard"/>
+                <a:cs typeface="Pretendard"/>
+              </a:rPr>
+              <a:t>ping 이 1 인지</a:t>
             </a:r>
           </a:p>
         </p:txBody>
@@ -10835,7 +10871,25 @@
                 <a:ea typeface="Pretendard"/>
                 <a:cs typeface="Pretendard"/>
               </a:rPr>
-              <a:t>E11000 duplicate key</a:t>
+              <a:t>No module named</a:t>
+            </a:r>
+          </a:p>
+          <a:p>
+            <a:pPr algn="l">
+              <a:lnSpc>
+                <a:spcPct val="115000"/>
+              </a:lnSpc>
+            </a:pPr>
+            <a:r>
+              <a:rPr sz="1875" b="1">
+                <a:solidFill>
+                  <a:srgbClr val="0D2B5E"/>
+                </a:solidFill>
+                <a:latin typeface="Pretendard"/>
+                <a:ea typeface="Pretendard"/>
+                <a:cs typeface="Pretendard"/>
+              </a:rPr>
+              <a:t>'pymongo'</a:t>
             </a:r>
           </a:p>
         </p:txBody>
@@ -10910,7 +10964,7 @@
                 <a:ea typeface="Pretendard"/>
                 <a:cs typeface="Pretendard"/>
               </a:rPr>
-              <a:t>같은 _id 를 다시 넣음</a:t>
+              <a:t>가상환경 밖 · alias</a:t>
             </a:r>
           </a:p>
         </p:txBody>
@@ -10985,7 +11039,25 @@
                 <a:ea typeface="Pretendard"/>
                 <a:cs typeface="Pretendard"/>
               </a:rPr>
-              <a:t>_id 는 자동 생성 · deleteMany 후 재적재</a:t>
+              <a:t>activate 뒤</a:t>
+            </a:r>
+          </a:p>
+          <a:p>
+            <a:pPr algn="ctr">
+              <a:lnSpc>
+                <a:spcPct val="115000"/>
+              </a:lnSpc>
+            </a:pPr>
+            <a:r>
+              <a:rPr sz="1875" b="0">
+                <a:solidFill>
+                  <a:srgbClr val="3D3D3D"/>
+                </a:solidFill>
+                <a:latin typeface="Pretendard"/>
+                <a:ea typeface="Pretendard"/>
+                <a:cs typeface="Pretendard"/>
+              </a:rPr>
+              <a:t>sys.prefix 확인</a:t>
             </a:r>
           </a:p>
         </p:txBody>
@@ -11285,7 +11357,25 @@
                 <a:ea typeface="Pretendard"/>
                 <a:cs typeface="Pretendard"/>
               </a:rPr>
-              <a:t>update 뒤 필드가 사라짐</a:t>
+              <a:t>requires atomic</a:t>
+            </a:r>
+          </a:p>
+          <a:p>
+            <a:pPr algn="l">
+              <a:lnSpc>
+                <a:spcPct val="115000"/>
+              </a:lnSpc>
+            </a:pPr>
+            <a:r>
+              <a:rPr sz="1875" b="1">
+                <a:solidFill>
+                  <a:srgbClr val="0D2B5E"/>
+                </a:solidFill>
+                <a:latin typeface="Pretendard"/>
+                <a:ea typeface="Pretendard"/>
+                <a:cs typeface="Pretendard"/>
+              </a:rPr>
+              <a:t>operators</a:t>
             </a:r>
           </a:p>
         </p:txBody>
@@ -11360,7 +11450,7 @@
                 <a:ea typeface="Pretendard"/>
                 <a:cs typeface="Pretendard"/>
               </a:rPr>
-              <a:t>$set 없이 통째로 넘김</a:t>
+              <a:t>$set 없이 값만 넘김</a:t>
             </a:r>
           </a:p>
         </p:txBody>
@@ -13488,7 +13578,7 @@
                 <a:ea typeface="Pretendard"/>
                 <a:cs typeface="Pretendard"/>
               </a:rPr>
-              <a:t>expireAfterSeconds: 3600</a:t>
+              <a:t>새 컬렉션 · 60초</a:t>
             </a:r>
           </a:p>
           <a:p>
@@ -13506,7 +13596,7 @@
                 <a:ea typeface="Pretendard"/>
                 <a:cs typeface="Pretendard"/>
               </a:rPr>
-              <a:t>오래된 로그 자동 삭제 확인</a:t>
+              <a:t>기존 로그엔 걸지 말 것</a:t>
             </a:r>
           </a:p>
         </p:txBody>
@@ -13673,7 +13763,7 @@
                 <a:ea typeface="Pretendard"/>
                 <a:cs typeface="Pretendard"/>
               </a:rPr>
-              <a:t>level 없는 문서는</a:t>
+              <a:t>새 컬렉션에 걸기</a:t>
             </a:r>
           </a:p>
           <a:p>
@@ -13691,7 +13781,7 @@
                 <a:ea typeface="Pretendard"/>
                 <a:cs typeface="Pretendard"/>
               </a:rPr>
-              <a:t>거부되게 만들기</a:t>
+              <a:t>기존 것은 collMod</a:t>
             </a:r>
           </a:p>
         </p:txBody>
